--- a/academy/architecture-review-v25-zh.pptx
+++ b/academy/architecture-review-v25-zh.pptx
@@ -3207,8 +3207,8 @@
         </p:nvSpPr>
         <p:spPr>
           <a:xfrm>
-            <a:off x="868680" y="2395728"/>
-            <a:ext cx="10424160" cy="1371600"/>
+            <a:off x="868680" y="2340864"/>
+            <a:ext cx="10424160" cy="1481328"/>
           </a:xfrm>
           <a:prstGeom prst="rect">
             <a:avLst/>
@@ -3230,7 +3230,7 @@
               </a:spcAft>
             </a:pPr>
             <a:r>
-              <a:rPr sz="4000" b="1">
+              <a:rPr sz="3800" b="1">
                 <a:solidFill>
                   <a:srgbClr val="111827"/>
                 </a:solidFill>
@@ -3251,7 +3251,7 @@
               </a:spcAft>
             </a:pPr>
             <a:r>
-              <a:rPr sz="4000" b="1">
+              <a:rPr sz="3800" b="1">
                 <a:solidFill>
                   <a:srgbClr val="111827"/>
                 </a:solidFill>
